--- a/deep_learning/3_RNN_NLP/X_NER/NER.pptx
+++ b/deep_learning/3_RNN_NLP/X_NER/NER.pptx
@@ -223,7 +223,7 @@
           <a:p>
             <a:fld id="{7BAEECA8-D063-486F-AE31-5020270C1449}" type="datetimeFigureOut">
               <a:rPr lang="en-US" smtClean="0"/>
-              <a:t>4/21/2026</a:t>
+              <a:t>5/10/2026</a:t>
             </a:fld>
             <a:endParaRPr lang="en-US"/>
           </a:p>
@@ -400,7 +400,7 @@
           <a:p>
             <a:fld id="{CB233BD1-3BA8-448D-9D08-7846095EA517}" type="datetimeFigureOut">
               <a:rPr lang="en-US" smtClean="0"/>
-              <a:t>4/21/2026</a:t>
+              <a:t>5/10/2026</a:t>
             </a:fld>
             <a:endParaRPr lang="en-US"/>
           </a:p>
@@ -814,7 +814,7 @@
           <a:p>
             <a:fld id="{6383FAE1-13DE-4511-8C1B-C8AFB720664C}" type="datetimeFigureOut">
               <a:rPr lang="en-US" smtClean="0"/>
-              <a:t>4/21/2026</a:t>
+              <a:t>5/10/2026</a:t>
             </a:fld>
             <a:endParaRPr lang="en-US"/>
           </a:p>
@@ -1012,7 +1012,7 @@
           <a:p>
             <a:fld id="{6383FAE1-13DE-4511-8C1B-C8AFB720664C}" type="datetimeFigureOut">
               <a:rPr lang="en-US" smtClean="0"/>
-              <a:t>4/21/2026</a:t>
+              <a:t>5/10/2026</a:t>
             </a:fld>
             <a:endParaRPr lang="en-US"/>
           </a:p>
@@ -1220,7 +1220,7 @@
           <a:p>
             <a:fld id="{6383FAE1-13DE-4511-8C1B-C8AFB720664C}" type="datetimeFigureOut">
               <a:rPr lang="en-US" smtClean="0"/>
-              <a:t>4/21/2026</a:t>
+              <a:t>5/10/2026</a:t>
             </a:fld>
             <a:endParaRPr lang="en-US"/>
           </a:p>
@@ -1418,7 +1418,7 @@
           <a:p>
             <a:fld id="{6383FAE1-13DE-4511-8C1B-C8AFB720664C}" type="datetimeFigureOut">
               <a:rPr lang="en-US" smtClean="0"/>
-              <a:t>4/21/2026</a:t>
+              <a:t>5/10/2026</a:t>
             </a:fld>
             <a:endParaRPr lang="en-US"/>
           </a:p>
@@ -1693,7 +1693,7 @@
           <a:p>
             <a:fld id="{6383FAE1-13DE-4511-8C1B-C8AFB720664C}" type="datetimeFigureOut">
               <a:rPr lang="en-US" smtClean="0"/>
-              <a:t>4/21/2026</a:t>
+              <a:t>5/10/2026</a:t>
             </a:fld>
             <a:endParaRPr lang="en-US"/>
           </a:p>
@@ -1958,7 +1958,7 @@
           <a:p>
             <a:fld id="{6383FAE1-13DE-4511-8C1B-C8AFB720664C}" type="datetimeFigureOut">
               <a:rPr lang="en-US" smtClean="0"/>
-              <a:t>4/21/2026</a:t>
+              <a:t>5/10/2026</a:t>
             </a:fld>
             <a:endParaRPr lang="en-US"/>
           </a:p>
@@ -2370,7 +2370,7 @@
           <a:p>
             <a:fld id="{6383FAE1-13DE-4511-8C1B-C8AFB720664C}" type="datetimeFigureOut">
               <a:rPr lang="en-US" smtClean="0"/>
-              <a:t>4/21/2026</a:t>
+              <a:t>5/10/2026</a:t>
             </a:fld>
             <a:endParaRPr lang="en-US"/>
           </a:p>
@@ -2511,7 +2511,7 @@
           <a:p>
             <a:fld id="{6383FAE1-13DE-4511-8C1B-C8AFB720664C}" type="datetimeFigureOut">
               <a:rPr lang="en-US" smtClean="0"/>
-              <a:t>4/21/2026</a:t>
+              <a:t>5/10/2026</a:t>
             </a:fld>
             <a:endParaRPr lang="en-US"/>
           </a:p>
@@ -2624,7 +2624,7 @@
           <a:p>
             <a:fld id="{6383FAE1-13DE-4511-8C1B-C8AFB720664C}" type="datetimeFigureOut">
               <a:rPr lang="en-US" smtClean="0"/>
-              <a:t>4/21/2026</a:t>
+              <a:t>5/10/2026</a:t>
             </a:fld>
             <a:endParaRPr lang="en-US"/>
           </a:p>
@@ -2935,7 +2935,7 @@
           <a:p>
             <a:fld id="{6383FAE1-13DE-4511-8C1B-C8AFB720664C}" type="datetimeFigureOut">
               <a:rPr lang="en-US" smtClean="0"/>
-              <a:t>4/21/2026</a:t>
+              <a:t>5/10/2026</a:t>
             </a:fld>
             <a:endParaRPr lang="en-US"/>
           </a:p>
@@ -3226,7 +3226,7 @@
           <a:p>
             <a:fld id="{6383FAE1-13DE-4511-8C1B-C8AFB720664C}" type="datetimeFigureOut">
               <a:rPr lang="en-US" smtClean="0"/>
-              <a:t>4/21/2026</a:t>
+              <a:t>5/10/2026</a:t>
             </a:fld>
             <a:endParaRPr lang="en-US"/>
           </a:p>
@@ -3470,7 +3470,7 @@
           <a:p>
             <a:fld id="{6383FAE1-13DE-4511-8C1B-C8AFB720664C}" type="datetimeFigureOut">
               <a:rPr lang="en-US" smtClean="0"/>
-              <a:t>4/21/2026</a:t>
+              <a:t>5/10/2026</a:t>
             </a:fld>
             <a:endParaRPr lang="en-US"/>
           </a:p>
@@ -4910,7 +4910,7 @@
                         <a:buNone/>
                       </a:pPr>
                       <a:r>
-                        <a:rPr lang="en-US" sz="2400">
+                        <a:rPr lang="en-US" sz="2400" dirty="0">
                           <a:solidFill>
                             <a:schemeClr val="accent6">
                               <a:lumMod val="60000"/>
@@ -6301,7 +6301,7 @@
         </p:nvSpPr>
         <p:spPr>
           <a:xfrm>
-            <a:off x="182880" y="382012"/>
+            <a:off x="146304" y="1177540"/>
             <a:ext cx="11155680" cy="4154984"/>
           </a:xfrm>
           <a:prstGeom prst="rect">
